--- a/docs/运动打卡系统答辩PPT.pptx
+++ b/docs/运动打卡系统答辩PPT.pptx
@@ -2349,7 +2349,7 @@
           <a:p>
             <a:fld id="{5BCAD085-E8A6-8845-BD4E-CB4CCA059FC4}" type="datetimeFigureOut">
               <a:rPr lang="en-US" smtClean="0"/>
-              <a:t>7/11/2026</a:t>
+              <a:t>7/12/2026</a:t>
             </a:fld>
             <a:endParaRPr lang="en-US"/>
           </a:p>
@@ -2517,7 +2517,7 @@
           <a:p>
             <a:fld id="{5BCAD085-E8A6-8845-BD4E-CB4CCA059FC4}" type="datetimeFigureOut">
               <a:rPr lang="en-US" smtClean="0"/>
-              <a:t>7/11/2026</a:t>
+              <a:t>7/12/2026</a:t>
             </a:fld>
             <a:endParaRPr lang="en-US"/>
           </a:p>
@@ -2695,7 +2695,7 @@
           <a:p>
             <a:fld id="{5BCAD085-E8A6-8845-BD4E-CB4CCA059FC4}" type="datetimeFigureOut">
               <a:rPr lang="en-US" smtClean="0"/>
-              <a:t>7/11/2026</a:t>
+              <a:t>7/12/2026</a:t>
             </a:fld>
             <a:endParaRPr lang="en-US"/>
           </a:p>
@@ -2863,7 +2863,7 @@
           <a:p>
             <a:fld id="{5BCAD085-E8A6-8845-BD4E-CB4CCA059FC4}" type="datetimeFigureOut">
               <a:rPr lang="en-US" smtClean="0"/>
-              <a:t>7/11/2026</a:t>
+              <a:t>7/12/2026</a:t>
             </a:fld>
             <a:endParaRPr lang="en-US"/>
           </a:p>
@@ -3108,7 +3108,7 @@
           <a:p>
             <a:fld id="{5BCAD085-E8A6-8845-BD4E-CB4CCA059FC4}" type="datetimeFigureOut">
               <a:rPr lang="en-US" smtClean="0"/>
-              <a:t>7/11/2026</a:t>
+              <a:t>7/12/2026</a:t>
             </a:fld>
             <a:endParaRPr lang="en-US"/>
           </a:p>
@@ -3393,7 +3393,7 @@
           <a:p>
             <a:fld id="{5BCAD085-E8A6-8845-BD4E-CB4CCA059FC4}" type="datetimeFigureOut">
               <a:rPr lang="en-US" smtClean="0"/>
-              <a:t>7/11/2026</a:t>
+              <a:t>7/12/2026</a:t>
             </a:fld>
             <a:endParaRPr lang="en-US"/>
           </a:p>
@@ -3812,7 +3812,7 @@
           <a:p>
             <a:fld id="{5BCAD085-E8A6-8845-BD4E-CB4CCA059FC4}" type="datetimeFigureOut">
               <a:rPr lang="en-US" smtClean="0"/>
-              <a:t>7/11/2026</a:t>
+              <a:t>7/12/2026</a:t>
             </a:fld>
             <a:endParaRPr lang="en-US"/>
           </a:p>
@@ -3929,7 +3929,7 @@
           <a:p>
             <a:fld id="{5BCAD085-E8A6-8845-BD4E-CB4CCA059FC4}" type="datetimeFigureOut">
               <a:rPr lang="en-US" smtClean="0"/>
-              <a:t>7/11/2026</a:t>
+              <a:t>7/12/2026</a:t>
             </a:fld>
             <a:endParaRPr lang="en-US"/>
           </a:p>
@@ -4024,7 +4024,7 @@
           <a:p>
             <a:fld id="{5BCAD085-E8A6-8845-BD4E-CB4CCA059FC4}" type="datetimeFigureOut">
               <a:rPr lang="en-US" smtClean="0"/>
-              <a:t>7/11/2026</a:t>
+              <a:t>7/12/2026</a:t>
             </a:fld>
             <a:endParaRPr lang="en-US"/>
           </a:p>
@@ -4299,7 +4299,7 @@
           <a:p>
             <a:fld id="{5BCAD085-E8A6-8845-BD4E-CB4CCA059FC4}" type="datetimeFigureOut">
               <a:rPr lang="en-US" smtClean="0"/>
-              <a:t>7/11/2026</a:t>
+              <a:t>7/12/2026</a:t>
             </a:fld>
             <a:endParaRPr lang="en-US"/>
           </a:p>
@@ -4551,7 +4551,7 @@
           <a:p>
             <a:fld id="{5BCAD085-E8A6-8845-BD4E-CB4CCA059FC4}" type="datetimeFigureOut">
               <a:rPr lang="en-US" smtClean="0"/>
-              <a:t>7/11/2026</a:t>
+              <a:t>7/12/2026</a:t>
             </a:fld>
             <a:endParaRPr lang="en-US"/>
           </a:p>
@@ -4762,7 +4762,7 @@
           <a:p>
             <a:fld id="{5BCAD085-E8A6-8845-BD4E-CB4CCA059FC4}" type="datetimeFigureOut">
               <a:rPr lang="en-US" smtClean="0"/>
-              <a:t>7/11/2026</a:t>
+              <a:t>7/12/2026</a:t>
             </a:fld>
             <a:endParaRPr lang="en-US"/>
           </a:p>
@@ -5421,13 +5421,13 @@
   <p:clrMapOvr>
     <a:masterClrMapping/>
   </p:clrMapOvr>
-  <mc:AlternateContent xmlns:mc="http://schemas.openxmlformats.org/markup-compatibility/2006">
-    <mc:Choice xmlns:p14="http://schemas.microsoft.com/office/powerpoint/2010/main" Requires="p14">
+  <mc:AlternateContent xmlns:mc="http://schemas.openxmlformats.org/markup-compatibility/2006" xmlns:p14="http://schemas.microsoft.com/office/powerpoint/2010/main">
+    <mc:Choice Requires="p14">
       <p:transition p14:dur="400">
         <p:fade/>
       </p:transition>
     </mc:Choice>
-    <mc:Fallback>
+    <mc:Fallback xmlns="">
       <p:transition>
         <p:fade/>
       </p:transition>
@@ -8011,13 +8011,13 @@
   <p:clrMapOvr>
     <a:masterClrMapping/>
   </p:clrMapOvr>
-  <mc:AlternateContent xmlns:mc="http://schemas.openxmlformats.org/markup-compatibility/2006">
-    <mc:Choice xmlns:p14="http://schemas.microsoft.com/office/powerpoint/2010/main" Requires="p14">
+  <mc:AlternateContent xmlns:mc="http://schemas.openxmlformats.org/markup-compatibility/2006" xmlns:p14="http://schemas.microsoft.com/office/powerpoint/2010/main">
+    <mc:Choice Requires="p14">
       <p:transition p14:dur="400">
         <p:fade/>
       </p:transition>
     </mc:Choice>
-    <mc:Fallback>
+    <mc:Fallback xmlns="">
       <p:transition>
         <p:fade/>
       </p:transition>
@@ -9258,13 +9258,13 @@
   <p:clrMapOvr>
     <a:masterClrMapping/>
   </p:clrMapOvr>
-  <mc:AlternateContent xmlns:mc="http://schemas.openxmlformats.org/markup-compatibility/2006">
-    <mc:Choice xmlns:p14="http://schemas.microsoft.com/office/powerpoint/2010/main" Requires="p14">
+  <mc:AlternateContent xmlns:mc="http://schemas.openxmlformats.org/markup-compatibility/2006" xmlns:p14="http://schemas.microsoft.com/office/powerpoint/2010/main">
+    <mc:Choice Requires="p14">
       <p:transition p14:dur="400">
         <p:fade/>
       </p:transition>
     </mc:Choice>
-    <mc:Fallback>
+    <mc:Fallback xmlns="">
       <p:transition>
         <p:fade/>
       </p:transition>
@@ -11177,13 +11177,13 @@
   <p:clrMapOvr>
     <a:masterClrMapping/>
   </p:clrMapOvr>
-  <mc:AlternateContent xmlns:mc="http://schemas.openxmlformats.org/markup-compatibility/2006">
-    <mc:Choice xmlns:p14="http://schemas.microsoft.com/office/powerpoint/2010/main" Requires="p14">
+  <mc:AlternateContent xmlns:mc="http://schemas.openxmlformats.org/markup-compatibility/2006" xmlns:p14="http://schemas.microsoft.com/office/powerpoint/2010/main">
+    <mc:Choice Requires="p14">
       <p:transition p14:dur="400">
         <p:fade/>
       </p:transition>
     </mc:Choice>
-    <mc:Fallback>
+    <mc:Fallback xmlns="">
       <p:transition>
         <p:fade/>
       </p:transition>
@@ -11402,13 +11402,13 @@
   <p:clrMapOvr>
     <a:masterClrMapping/>
   </p:clrMapOvr>
-  <mc:AlternateContent xmlns:mc="http://schemas.openxmlformats.org/markup-compatibility/2006">
-    <mc:Choice xmlns:p14="http://schemas.microsoft.com/office/powerpoint/2010/main" Requires="p14">
+  <mc:AlternateContent xmlns:mc="http://schemas.openxmlformats.org/markup-compatibility/2006" xmlns:p14="http://schemas.microsoft.com/office/powerpoint/2010/main">
+    <mc:Choice Requires="p14">
       <p:transition p14:dur="400">
         <p:fade/>
       </p:transition>
     </mc:Choice>
-    <mc:Fallback>
+    <mc:Fallback xmlns="">
       <p:transition>
         <p:fade/>
       </p:transition>
@@ -13091,13 +13091,13 @@
   <p:clrMapOvr>
     <a:masterClrMapping/>
   </p:clrMapOvr>
-  <mc:AlternateContent xmlns:mc="http://schemas.openxmlformats.org/markup-compatibility/2006">
-    <mc:Choice xmlns:p14="http://schemas.microsoft.com/office/powerpoint/2010/main" Requires="p14">
+  <mc:AlternateContent xmlns:mc="http://schemas.openxmlformats.org/markup-compatibility/2006" xmlns:p14="http://schemas.microsoft.com/office/powerpoint/2010/main">
+    <mc:Choice Requires="p14">
       <p:transition p14:dur="400">
         <p:fade/>
       </p:transition>
     </mc:Choice>
-    <mc:Fallback>
+    <mc:Fallback xmlns="">
       <p:transition>
         <p:fade/>
       </p:transition>
@@ -14490,13 +14490,13 @@
   <p:clrMapOvr>
     <a:masterClrMapping/>
   </p:clrMapOvr>
-  <mc:AlternateContent xmlns:mc="http://schemas.openxmlformats.org/markup-compatibility/2006">
-    <mc:Choice xmlns:p14="http://schemas.microsoft.com/office/powerpoint/2010/main" Requires="p14">
+  <mc:AlternateContent xmlns:mc="http://schemas.openxmlformats.org/markup-compatibility/2006" xmlns:p14="http://schemas.microsoft.com/office/powerpoint/2010/main">
+    <mc:Choice Requires="p14">
       <p:transition p14:dur="400">
         <p:fade/>
       </p:transition>
     </mc:Choice>
-    <mc:Fallback>
+    <mc:Fallback xmlns="">
       <p:transition>
         <p:fade/>
       </p:transition>
@@ -14680,7 +14680,7 @@
         </p:nvSpPr>
         <p:spPr>
           <a:xfrm>
-            <a:off x="533400" y="1381125"/>
+            <a:off x="540856" y="1395412"/>
             <a:ext cx="11125200" cy="419100"/>
           </a:xfrm>
           <a:prstGeom prst="roundRect">
@@ -14695,6 +14695,13 @@
             <a:noFill/>
           </a:ln>
         </p:spPr>
+        <p:txBody>
+          <a:bodyPr/>
+          <a:lstStyle/>
+          <a:p>
+            <a:endParaRPr lang="zh-CN" altLang="en-US" dirty="0"/>
+          </a:p>
+        </p:txBody>
       </p:sp>
       <p:sp>
         <p:nvSpPr>
@@ -15772,18 +15779,48 @@
           </a:p>
         </p:txBody>
       </p:sp>
+      <p:pic>
+        <p:nvPicPr>
+          <p:cNvPr id="43" name="图片 42">
+            <a:extLst>
+              <a:ext uri="{FF2B5EF4-FFF2-40B4-BE49-F238E27FC236}">
+                <a16:creationId xmlns:a16="http://schemas.microsoft.com/office/drawing/2014/main" id="{F611DFD4-EDB6-E5FB-1364-EF2A37E86592}"/>
+              </a:ext>
+            </a:extLst>
+          </p:cNvPr>
+          <p:cNvPicPr>
+            <a:picLocks noChangeAspect="1"/>
+          </p:cNvPicPr>
+          <p:nvPr/>
+        </p:nvPicPr>
+        <p:blipFill>
+          <a:blip r:embed="rId3"/>
+          <a:stretch>
+            <a:fillRect/>
+          </a:stretch>
+        </p:blipFill>
+        <p:spPr>
+          <a:xfrm>
+            <a:off x="540857" y="1357023"/>
+            <a:ext cx="11214964" cy="5439473"/>
+          </a:xfrm>
+          <a:prstGeom prst="rect">
+            <a:avLst/>
+          </a:prstGeom>
+        </p:spPr>
+      </p:pic>
     </p:spTree>
   </p:cSld>
   <p:clrMapOvr>
     <a:masterClrMapping/>
   </p:clrMapOvr>
-  <mc:AlternateContent xmlns:mc="http://schemas.openxmlformats.org/markup-compatibility/2006">
-    <mc:Choice xmlns:p14="http://schemas.microsoft.com/office/powerpoint/2010/main" Requires="p14">
+  <mc:AlternateContent xmlns:mc="http://schemas.openxmlformats.org/markup-compatibility/2006" xmlns:p14="http://schemas.microsoft.com/office/powerpoint/2010/main">
+    <mc:Choice Requires="p14">
       <p:transition p14:dur="400">
         <p:fade/>
       </p:transition>
     </mc:Choice>
-    <mc:Fallback>
+    <mc:Fallback xmlns="">
       <p:transition>
         <p:fade/>
       </p:transition>
@@ -17427,13 +17464,13 @@
   <p:clrMapOvr>
     <a:masterClrMapping/>
   </p:clrMapOvr>
-  <mc:AlternateContent xmlns:mc="http://schemas.openxmlformats.org/markup-compatibility/2006">
-    <mc:Choice xmlns:p14="http://schemas.microsoft.com/office/powerpoint/2010/main" Requires="p14">
+  <mc:AlternateContent xmlns:mc="http://schemas.openxmlformats.org/markup-compatibility/2006" xmlns:p14="http://schemas.microsoft.com/office/powerpoint/2010/main">
+    <mc:Choice Requires="p14">
       <p:transition p14:dur="400">
         <p:fade/>
       </p:transition>
     </mc:Choice>
-    <mc:Fallback>
+    <mc:Fallback xmlns="">
       <p:transition>
         <p:fade/>
       </p:transition>
@@ -19402,13 +19439,13 @@
   <p:clrMapOvr>
     <a:masterClrMapping/>
   </p:clrMapOvr>
-  <mc:AlternateContent xmlns:mc="http://schemas.openxmlformats.org/markup-compatibility/2006">
-    <mc:Choice xmlns:p14="http://schemas.microsoft.com/office/powerpoint/2010/main" Requires="p14">
+  <mc:AlternateContent xmlns:mc="http://schemas.openxmlformats.org/markup-compatibility/2006" xmlns:p14="http://schemas.microsoft.com/office/powerpoint/2010/main">
+    <mc:Choice Requires="p14">
       <p:transition p14:dur="400">
         <p:fade/>
       </p:transition>
     </mc:Choice>
-    <mc:Fallback>
+    <mc:Fallback xmlns="">
       <p:transition>
         <p:fade/>
       </p:transition>
@@ -19627,13 +19664,13 @@
   <p:clrMapOvr>
     <a:masterClrMapping/>
   </p:clrMapOvr>
-  <mc:AlternateContent xmlns:mc="http://schemas.openxmlformats.org/markup-compatibility/2006">
-    <mc:Choice xmlns:p14="http://schemas.microsoft.com/office/powerpoint/2010/main" Requires="p14">
+  <mc:AlternateContent xmlns:mc="http://schemas.openxmlformats.org/markup-compatibility/2006" xmlns:p14="http://schemas.microsoft.com/office/powerpoint/2010/main">
+    <mc:Choice Requires="p14">
       <p:transition p14:dur="400">
         <p:fade/>
       </p:transition>
     </mc:Choice>
-    <mc:Fallback>
+    <mc:Fallback xmlns="">
       <p:transition>
         <p:fade/>
       </p:transition>
@@ -21268,13 +21305,13 @@
   <p:clrMapOvr>
     <a:masterClrMapping/>
   </p:clrMapOvr>
-  <mc:AlternateContent xmlns:mc="http://schemas.openxmlformats.org/markup-compatibility/2006">
-    <mc:Choice xmlns:p14="http://schemas.microsoft.com/office/powerpoint/2010/main" Requires="p14">
+  <mc:AlternateContent xmlns:mc="http://schemas.openxmlformats.org/markup-compatibility/2006" xmlns:p14="http://schemas.microsoft.com/office/powerpoint/2010/main">
+    <mc:Choice Requires="p14">
       <p:transition p14:dur="400">
         <p:fade/>
       </p:transition>
     </mc:Choice>
-    <mc:Fallback>
+    <mc:Fallback xmlns="">
       <p:transition>
         <p:fade/>
       </p:transition>
@@ -22501,13 +22538,13 @@
   <p:clrMapOvr>
     <a:masterClrMapping/>
   </p:clrMapOvr>
-  <mc:AlternateContent xmlns:mc="http://schemas.openxmlformats.org/markup-compatibility/2006">
-    <mc:Choice xmlns:p14="http://schemas.microsoft.com/office/powerpoint/2010/main" Requires="p14">
+  <mc:AlternateContent xmlns:mc="http://schemas.openxmlformats.org/markup-compatibility/2006" xmlns:p14="http://schemas.microsoft.com/office/powerpoint/2010/main">
+    <mc:Choice Requires="p14">
       <p:transition p14:dur="400">
         <p:fade/>
       </p:transition>
     </mc:Choice>
-    <mc:Fallback>
+    <mc:Fallback xmlns="">
       <p:transition>
         <p:fade/>
       </p:transition>
@@ -24096,13 +24133,13 @@
   <p:clrMapOvr>
     <a:masterClrMapping/>
   </p:clrMapOvr>
-  <mc:AlternateContent xmlns:mc="http://schemas.openxmlformats.org/markup-compatibility/2006">
-    <mc:Choice xmlns:p14="http://schemas.microsoft.com/office/powerpoint/2010/main" Requires="p14">
+  <mc:AlternateContent xmlns:mc="http://schemas.openxmlformats.org/markup-compatibility/2006" xmlns:p14="http://schemas.microsoft.com/office/powerpoint/2010/main">
+    <mc:Choice Requires="p14">
       <p:transition p14:dur="400">
         <p:fade/>
       </p:transition>
     </mc:Choice>
-    <mc:Fallback>
+    <mc:Fallback xmlns="">
       <p:transition>
         <p:fade/>
       </p:transition>
@@ -25956,13 +25993,13 @@
   <p:clrMapOvr>
     <a:masterClrMapping/>
   </p:clrMapOvr>
-  <mc:AlternateContent xmlns:mc="http://schemas.openxmlformats.org/markup-compatibility/2006">
-    <mc:Choice xmlns:p14="http://schemas.microsoft.com/office/powerpoint/2010/main" Requires="p14">
+  <mc:AlternateContent xmlns:mc="http://schemas.openxmlformats.org/markup-compatibility/2006" xmlns:p14="http://schemas.microsoft.com/office/powerpoint/2010/main">
+    <mc:Choice Requires="p14">
       <p:transition p14:dur="400">
         <p:fade/>
       </p:transition>
     </mc:Choice>
-    <mc:Fallback>
+    <mc:Fallback xmlns="">
       <p:transition>
         <p:fade/>
       </p:transition>
@@ -26120,8 +26157,8 @@
         </p:nvSpPr>
         <p:spPr>
           <a:xfrm>
-            <a:off x="533400" y="1285875"/>
-            <a:ext cx="3238500" cy="1905000"/>
+            <a:off x="533400" y="1285874"/>
+            <a:ext cx="3238500" cy="1976575"/>
           </a:xfrm>
           <a:prstGeom prst="roundRect">
             <a:avLst>
@@ -26460,7 +26497,7 @@
         <p:spPr>
           <a:xfrm>
             <a:off x="3962400" y="1285875"/>
-            <a:ext cx="3238500" cy="1905000"/>
+            <a:ext cx="3238500" cy="1976574"/>
           </a:xfrm>
           <a:prstGeom prst="roundRect">
             <a:avLst>
@@ -26807,8 +26844,8 @@
         </p:nvSpPr>
         <p:spPr>
           <a:xfrm>
-            <a:off x="7391400" y="1285875"/>
-            <a:ext cx="3238500" cy="1905000"/>
+            <a:off x="7391400" y="1285874"/>
+            <a:ext cx="3238500" cy="1976575"/>
           </a:xfrm>
           <a:prstGeom prst="roundRect">
             <a:avLst>
@@ -27478,13 +27515,13 @@
   <p:clrMapOvr>
     <a:masterClrMapping/>
   </p:clrMapOvr>
-  <mc:AlternateContent xmlns:mc="http://schemas.openxmlformats.org/markup-compatibility/2006">
-    <mc:Choice xmlns:p14="http://schemas.microsoft.com/office/powerpoint/2010/main" Requires="p14">
+  <mc:AlternateContent xmlns:mc="http://schemas.openxmlformats.org/markup-compatibility/2006" xmlns:p14="http://schemas.microsoft.com/office/powerpoint/2010/main">
+    <mc:Choice Requires="p14">
       <p:transition p14:dur="400">
         <p:fade/>
       </p:transition>
     </mc:Choice>
-    <mc:Fallback>
+    <mc:Fallback xmlns="">
       <p:transition>
         <p:fade/>
       </p:transition>
@@ -28725,13 +28762,13 @@
   <p:clrMapOvr>
     <a:masterClrMapping/>
   </p:clrMapOvr>
-  <mc:AlternateContent xmlns:mc="http://schemas.openxmlformats.org/markup-compatibility/2006">
-    <mc:Choice xmlns:p14="http://schemas.microsoft.com/office/powerpoint/2010/main" Requires="p14">
+  <mc:AlternateContent xmlns:mc="http://schemas.openxmlformats.org/markup-compatibility/2006" xmlns:p14="http://schemas.microsoft.com/office/powerpoint/2010/main">
+    <mc:Choice Requires="p14">
       <p:transition p14:dur="400">
         <p:fade/>
       </p:transition>
     </mc:Choice>
-    <mc:Fallback>
+    <mc:Fallback xmlns="">
       <p:transition>
         <p:fade/>
       </p:transition>
@@ -28950,13 +28987,13 @@
   <p:clrMapOvr>
     <a:masterClrMapping/>
   </p:clrMapOvr>
-  <mc:AlternateContent xmlns:mc="http://schemas.openxmlformats.org/markup-compatibility/2006">
-    <mc:Choice xmlns:p14="http://schemas.microsoft.com/office/powerpoint/2010/main" Requires="p14">
+  <mc:AlternateContent xmlns:mc="http://schemas.openxmlformats.org/markup-compatibility/2006" xmlns:p14="http://schemas.microsoft.com/office/powerpoint/2010/main">
+    <mc:Choice Requires="p14">
       <p:transition p14:dur="400">
         <p:fade/>
       </p:transition>
     </mc:Choice>
-    <mc:Fallback>
+    <mc:Fallback xmlns="">
       <p:transition>
         <p:fade/>
       </p:transition>
@@ -30917,13 +30954,13 @@
   <p:clrMapOvr>
     <a:masterClrMapping/>
   </p:clrMapOvr>
-  <mc:AlternateContent xmlns:mc="http://schemas.openxmlformats.org/markup-compatibility/2006">
-    <mc:Choice xmlns:p14="http://schemas.microsoft.com/office/powerpoint/2010/main" Requires="p14">
+  <mc:AlternateContent xmlns:mc="http://schemas.openxmlformats.org/markup-compatibility/2006" xmlns:p14="http://schemas.microsoft.com/office/powerpoint/2010/main">
+    <mc:Choice Requires="p14">
       <p:transition p14:dur="400">
         <p:fade/>
       </p:transition>
     </mc:Choice>
-    <mc:Fallback>
+    <mc:Fallback xmlns="">
       <p:transition>
         <p:fade/>
       </p:transition>
@@ -31794,13 +31831,13 @@
   <p:clrMapOvr>
     <a:masterClrMapping/>
   </p:clrMapOvr>
-  <mc:AlternateContent xmlns:mc="http://schemas.openxmlformats.org/markup-compatibility/2006">
-    <mc:Choice xmlns:p14="http://schemas.microsoft.com/office/powerpoint/2010/main" Requires="p14">
+  <mc:AlternateContent xmlns:mc="http://schemas.openxmlformats.org/markup-compatibility/2006" xmlns:p14="http://schemas.microsoft.com/office/powerpoint/2010/main">
+    <mc:Choice Requires="p14">
       <p:transition p14:dur="400">
         <p:fade/>
       </p:transition>
     </mc:Choice>
-    <mc:Fallback>
+    <mc:Fallback xmlns="">
       <p:transition>
         <p:fade/>
       </p:transition>
@@ -33339,13 +33376,13 @@
   <p:clrMapOvr>
     <a:masterClrMapping/>
   </p:clrMapOvr>
-  <mc:AlternateContent xmlns:mc="http://schemas.openxmlformats.org/markup-compatibility/2006">
-    <mc:Choice xmlns:p14="http://schemas.microsoft.com/office/powerpoint/2010/main" Requires="p14">
+  <mc:AlternateContent xmlns:mc="http://schemas.openxmlformats.org/markup-compatibility/2006" xmlns:p14="http://schemas.microsoft.com/office/powerpoint/2010/main">
+    <mc:Choice Requires="p14">
       <p:transition p14:dur="400">
         <p:fade/>
       </p:transition>
     </mc:Choice>
-    <mc:Fallback>
+    <mc:Fallback xmlns="">
       <p:transition>
         <p:fade/>
       </p:transition>
@@ -34579,13 +34616,13 @@
   <p:clrMapOvr>
     <a:masterClrMapping/>
   </p:clrMapOvr>
-  <mc:AlternateContent xmlns:mc="http://schemas.openxmlformats.org/markup-compatibility/2006">
-    <mc:Choice xmlns:p14="http://schemas.microsoft.com/office/powerpoint/2010/main" Requires="p14">
+  <mc:AlternateContent xmlns:mc="http://schemas.openxmlformats.org/markup-compatibility/2006" xmlns:p14="http://schemas.microsoft.com/office/powerpoint/2010/main">
+    <mc:Choice Requires="p14">
       <p:transition p14:dur="400">
         <p:fade/>
       </p:transition>
     </mc:Choice>
-    <mc:Fallback>
+    <mc:Fallback xmlns="">
       <p:transition>
         <p:fade/>
       </p:transition>
@@ -35526,13 +35563,13 @@
   <p:clrMapOvr>
     <a:masterClrMapping/>
   </p:clrMapOvr>
-  <mc:AlternateContent xmlns:mc="http://schemas.openxmlformats.org/markup-compatibility/2006">
-    <mc:Choice xmlns:p14="http://schemas.microsoft.com/office/powerpoint/2010/main" Requires="p14">
+  <mc:AlternateContent xmlns:mc="http://schemas.openxmlformats.org/markup-compatibility/2006" xmlns:p14="http://schemas.microsoft.com/office/powerpoint/2010/main">
+    <mc:Choice Requires="p14">
       <p:transition p14:dur="400">
         <p:fade/>
       </p:transition>
     </mc:Choice>
-    <mc:Fallback>
+    <mc:Fallback xmlns="">
       <p:transition>
         <p:fade/>
       </p:transition>
@@ -36719,13 +36756,13 @@
   <p:clrMapOvr>
     <a:masterClrMapping/>
   </p:clrMapOvr>
-  <mc:AlternateContent xmlns:mc="http://schemas.openxmlformats.org/markup-compatibility/2006">
-    <mc:Choice xmlns:p14="http://schemas.microsoft.com/office/powerpoint/2010/main" Requires="p14">
+  <mc:AlternateContent xmlns:mc="http://schemas.openxmlformats.org/markup-compatibility/2006" xmlns:p14="http://schemas.microsoft.com/office/powerpoint/2010/main">
+    <mc:Choice Requires="p14">
       <p:transition p14:dur="400">
         <p:fade/>
       </p:transition>
     </mc:Choice>
-    <mc:Fallback>
+    <mc:Fallback xmlns="">
       <p:transition>
         <p:fade/>
       </p:transition>
@@ -38538,13 +38575,13 @@
   <p:clrMapOvr>
     <a:masterClrMapping/>
   </p:clrMapOvr>
-  <mc:AlternateContent xmlns:mc="http://schemas.openxmlformats.org/markup-compatibility/2006">
-    <mc:Choice xmlns:p14="http://schemas.microsoft.com/office/powerpoint/2010/main" Requires="p14">
+  <mc:AlternateContent xmlns:mc="http://schemas.openxmlformats.org/markup-compatibility/2006" xmlns:p14="http://schemas.microsoft.com/office/powerpoint/2010/main">
+    <mc:Choice Requires="p14">
       <p:transition p14:dur="400">
         <p:fade/>
       </p:transition>
     </mc:Choice>
-    <mc:Fallback>
+    <mc:Fallback xmlns="">
       <p:transition>
         <p:fade/>
       </p:transition>
@@ -38739,13 +38776,13 @@
   <p:clrMapOvr>
     <a:masterClrMapping/>
   </p:clrMapOvr>
-  <mc:AlternateContent xmlns:mc="http://schemas.openxmlformats.org/markup-compatibility/2006">
-    <mc:Choice xmlns:p14="http://schemas.microsoft.com/office/powerpoint/2010/main" Requires="p14">
+  <mc:AlternateContent xmlns:mc="http://schemas.openxmlformats.org/markup-compatibility/2006" xmlns:p14="http://schemas.microsoft.com/office/powerpoint/2010/main">
+    <mc:Choice Requires="p14">
       <p:transition p14:dur="400">
         <p:fade/>
       </p:transition>
     </mc:Choice>
-    <mc:Fallback>
+    <mc:Fallback xmlns="">
       <p:transition>
         <p:fade/>
       </p:transition>
@@ -41675,13 +41712,13 @@
   <p:clrMapOvr>
     <a:masterClrMapping/>
   </p:clrMapOvr>
-  <mc:AlternateContent xmlns:mc="http://schemas.openxmlformats.org/markup-compatibility/2006">
-    <mc:Choice xmlns:p14="http://schemas.microsoft.com/office/powerpoint/2010/main" Requires="p14">
+  <mc:AlternateContent xmlns:mc="http://schemas.openxmlformats.org/markup-compatibility/2006" xmlns:p14="http://schemas.microsoft.com/office/powerpoint/2010/main">
+    <mc:Choice Requires="p14">
       <p:transition p14:dur="400">
         <p:fade/>
       </p:transition>
     </mc:Choice>
-    <mc:Fallback>
+    <mc:Fallback xmlns="">
       <p:transition>
         <p:fade/>
       </p:transition>
@@ -42985,13 +43022,13 @@
   <p:clrMapOvr>
     <a:masterClrMapping/>
   </p:clrMapOvr>
-  <mc:AlternateContent xmlns:mc="http://schemas.openxmlformats.org/markup-compatibility/2006">
-    <mc:Choice xmlns:p14="http://schemas.microsoft.com/office/powerpoint/2010/main" Requires="p14">
+  <mc:AlternateContent xmlns:mc="http://schemas.openxmlformats.org/markup-compatibility/2006" xmlns:p14="http://schemas.microsoft.com/office/powerpoint/2010/main">
+    <mc:Choice Requires="p14">
       <p:transition p14:dur="400">
         <p:fade/>
       </p:transition>
     </mc:Choice>
-    <mc:Fallback>
+    <mc:Fallback xmlns="">
       <p:transition>
         <p:fade/>
       </p:transition>
@@ -44496,13 +44533,13 @@
   <p:clrMapOvr>
     <a:masterClrMapping/>
   </p:clrMapOvr>
-  <mc:AlternateContent xmlns:mc="http://schemas.openxmlformats.org/markup-compatibility/2006">
-    <mc:Choice xmlns:p14="http://schemas.microsoft.com/office/powerpoint/2010/main" Requires="p14">
+  <mc:AlternateContent xmlns:mc="http://schemas.openxmlformats.org/markup-compatibility/2006" xmlns:p14="http://schemas.microsoft.com/office/powerpoint/2010/main">
+    <mc:Choice Requires="p14">
       <p:transition p14:dur="400">
         <p:fade/>
       </p:transition>
     </mc:Choice>
-    <mc:Fallback>
+    <mc:Fallback xmlns="">
       <p:transition>
         <p:fade/>
       </p:transition>
@@ -44761,13 +44798,13 @@
   <p:clrMapOvr>
     <a:masterClrMapping/>
   </p:clrMapOvr>
-  <mc:AlternateContent xmlns:mc="http://schemas.openxmlformats.org/markup-compatibility/2006">
-    <mc:Choice xmlns:p14="http://schemas.microsoft.com/office/powerpoint/2010/main" Requires="p14">
+  <mc:AlternateContent xmlns:mc="http://schemas.openxmlformats.org/markup-compatibility/2006" xmlns:p14="http://schemas.microsoft.com/office/powerpoint/2010/main">
+    <mc:Choice Requires="p14">
       <p:transition p14:dur="400">
         <p:fade/>
       </p:transition>
     </mc:Choice>
-    <mc:Fallback>
+    <mc:Fallback xmlns="">
       <p:transition>
         <p:fade/>
       </p:transition>
@@ -45976,13 +46013,13 @@
   <p:clrMapOvr>
     <a:masterClrMapping/>
   </p:clrMapOvr>
-  <mc:AlternateContent xmlns:mc="http://schemas.openxmlformats.org/markup-compatibility/2006">
-    <mc:Choice xmlns:p14="http://schemas.microsoft.com/office/powerpoint/2010/main" Requires="p14">
+  <mc:AlternateContent xmlns:mc="http://schemas.openxmlformats.org/markup-compatibility/2006" xmlns:p14="http://schemas.microsoft.com/office/powerpoint/2010/main">
+    <mc:Choice Requires="p14">
       <p:transition p14:dur="400">
         <p:fade/>
       </p:transition>
     </mc:Choice>
-    <mc:Fallback>
+    <mc:Fallback xmlns="">
       <p:transition>
         <p:fade/>
       </p:transition>
@@ -47489,13 +47526,13 @@
   <p:clrMapOvr>
     <a:masterClrMapping/>
   </p:clrMapOvr>
-  <mc:AlternateContent xmlns:mc="http://schemas.openxmlformats.org/markup-compatibility/2006">
-    <mc:Choice xmlns:p14="http://schemas.microsoft.com/office/powerpoint/2010/main" Requires="p14">
+  <mc:AlternateContent xmlns:mc="http://schemas.openxmlformats.org/markup-compatibility/2006" xmlns:p14="http://schemas.microsoft.com/office/powerpoint/2010/main">
+    <mc:Choice Requires="p14">
       <p:transition p14:dur="400">
         <p:fade/>
       </p:transition>
     </mc:Choice>
-    <mc:Fallback>
+    <mc:Fallback xmlns="">
       <p:transition>
         <p:fade/>
       </p:transition>
